--- a/prezentace/1. ročník/12 - HTML + CSS (hands on).pptx
+++ b/prezentace/1. ročník/12 - HTML + CSS (hands on).pptx
@@ -131,6 +131,7 @@
 <file path=ppt/revisionInfo.xml><?xml version="1.0" encoding="utf-8"?>
 <p1510:revInfo xmlns:a="http://schemas.openxmlformats.org/drawingml/2006/main" xmlns:r="http://schemas.openxmlformats.org/officeDocument/2006/relationships" xmlns:p1510="http://schemas.microsoft.com/office/powerpoint/2015/10/main">
   <p1510:revLst>
+    <p1510:client id="{AE004B68-5C12-4ED9-9802-66ACD336FB16}" v="1" dt="2026-02-09T11:13:44.295"/>
     <p1510:client id="{BCFA2739-99FF-43A7-8921-A30199C72A57}" v="124" dt="2026-02-09T07:10:49.723"/>
     <p1510:client id="{C549298E-4727-47F4-9B9B-14F6AFABB066}" v="226" dt="2026-02-09T06:59:55.857"/>
   </p1510:revLst>
@@ -139,6 +140,30 @@
 
 <file path=ppt/changesInfos/changesInfo1.xml><?xml version="1.0" encoding="utf-8"?>
 <pc:chgInfo xmlns:a="http://schemas.openxmlformats.org/drawingml/2006/main" xmlns:r="http://schemas.openxmlformats.org/officeDocument/2006/relationships" xmlns:ac="http://schemas.microsoft.com/office/drawing/2013/main/command" xmlns:pc="http://schemas.microsoft.com/office/powerpoint/2013/main/command">
+  <pc:docChgLst>
+    <pc:chgData name="Sládeček David" userId="S::sladecek@hradebni.cz::474d93f0-3a32-49cc-b837-47806091b590" providerId="AD" clId="Web-{AE004B68-5C12-4ED9-9802-66ACD336FB16}"/>
+    <pc:docChg chg="modSld">
+      <pc:chgData name="Sládeček David" userId="S::sladecek@hradebni.cz::474d93f0-3a32-49cc-b837-47806091b590" providerId="AD" clId="Web-{AE004B68-5C12-4ED9-9802-66ACD336FB16}" dt="2026-02-09T11:13:44.295" v="0" actId="1076"/>
+      <pc:docMkLst>
+        <pc:docMk/>
+      </pc:docMkLst>
+      <pc:sldChg chg="modSp">
+        <pc:chgData name="Sládeček David" userId="S::sladecek@hradebni.cz::474d93f0-3a32-49cc-b837-47806091b590" providerId="AD" clId="Web-{AE004B68-5C12-4ED9-9802-66ACD336FB16}" dt="2026-02-09T11:13:44.295" v="0" actId="1076"/>
+        <pc:sldMkLst>
+          <pc:docMk/>
+          <pc:sldMk cId="0" sldId="258"/>
+        </pc:sldMkLst>
+        <pc:spChg chg="mod">
+          <ac:chgData name="Sládeček David" userId="S::sladecek@hradebni.cz::474d93f0-3a32-49cc-b837-47806091b590" providerId="AD" clId="Web-{AE004B68-5C12-4ED9-9802-66ACD336FB16}" dt="2026-02-09T11:13:44.295" v="0" actId="1076"/>
+          <ac:spMkLst>
+            <pc:docMk/>
+            <pc:sldMk cId="0" sldId="258"/>
+            <ac:spMk id="3" creationId="{00000000-0000-0000-0000-000000000000}"/>
+          </ac:spMkLst>
+        </pc:spChg>
+      </pc:sldChg>
+    </pc:docChg>
+  </pc:docChgLst>
   <pc:docChgLst>
     <pc:chgData name="Sládeček David" userId="S::sladecek@hradebni.cz::474d93f0-3a32-49cc-b837-47806091b590" providerId="AD" clId="Web-{BCFA2739-99FF-43A7-8921-A30199C72A57}"/>
     <pc:docChg chg="mod addSld delSld modSld sldOrd">
@@ -3355,13 +3380,6 @@
             <a:schemeClr val="lt1"/>
           </a:fontRef>
         </p:style>
-        <p:txBody>
-          <a:bodyPr/>
-          <a:lstStyle/>
-          <a:p>
-            <a:endParaRPr lang="cs-CZ"/>
-          </a:p>
-        </p:txBody>
       </p:sp>
       <p:sp>
         <p:nvSpPr>
@@ -3400,13 +3418,6 @@
             <a:schemeClr val="lt1"/>
           </a:fontRef>
         </p:style>
-        <p:txBody>
-          <a:bodyPr/>
-          <a:lstStyle/>
-          <a:p>
-            <a:endParaRPr lang="cs-CZ"/>
-          </a:p>
-        </p:txBody>
       </p:sp>
       <p:sp>
         <p:nvSpPr>
@@ -6335,13 +6346,6 @@
             <a:schemeClr val="lt1"/>
           </a:fontRef>
         </p:style>
-        <p:txBody>
-          <a:bodyPr/>
-          <a:lstStyle/>
-          <a:p>
-            <a:endParaRPr lang="cs-CZ"/>
-          </a:p>
-        </p:txBody>
       </p:sp>
       <p:sp>
         <p:nvSpPr>
@@ -6380,13 +6384,6 @@
             <a:schemeClr val="lt1"/>
           </a:fontRef>
         </p:style>
-        <p:txBody>
-          <a:bodyPr/>
-          <a:lstStyle/>
-          <a:p>
-            <a:endParaRPr lang="cs-CZ"/>
-          </a:p>
-        </p:txBody>
       </p:sp>
       <p:sp>
         <p:nvSpPr>
@@ -7196,7 +7193,7 @@
         </p:nvSpPr>
         <p:spPr>
           <a:xfrm>
-            <a:off x="457200" y="983060"/>
+            <a:off x="457200" y="1097280"/>
             <a:ext cx="8229600" cy="365760"/>
           </a:xfrm>
           <a:prstGeom prst="rect">
@@ -7291,13 +7288,6 @@
             <a:schemeClr val="dk1"/>
           </a:fontRef>
         </p:style>
-        <p:txBody>
-          <a:bodyPr/>
-          <a:lstStyle/>
-          <a:p>
-            <a:endParaRPr lang="cs-CZ"/>
-          </a:p>
-        </p:txBody>
       </p:sp>
       <p:sp>
         <p:nvSpPr>
@@ -7785,13 +7775,6 @@
             <a:schemeClr val="dk1"/>
           </a:fontRef>
         </p:style>
-        <p:txBody>
-          <a:bodyPr/>
-          <a:lstStyle/>
-          <a:p>
-            <a:endParaRPr lang="cs-CZ"/>
-          </a:p>
-        </p:txBody>
       </p:sp>
       <p:sp>
         <p:nvSpPr>
@@ -7901,13 +7884,6 @@
             <a:prstDash val="solid"/>
           </a:ln>
         </p:spPr>
-        <p:txBody>
-          <a:bodyPr/>
-          <a:lstStyle/>
-          <a:p>
-            <a:endParaRPr lang="cs-CZ"/>
-          </a:p>
-        </p:txBody>
       </p:sp>
       <p:sp>
         <p:nvSpPr>
@@ -8143,13 +8119,6 @@
             <a:schemeClr val="dk1"/>
           </a:fontRef>
         </p:style>
-        <p:txBody>
-          <a:bodyPr/>
-          <a:lstStyle/>
-          <a:p>
-            <a:endParaRPr lang="cs-CZ"/>
-          </a:p>
-        </p:txBody>
       </p:sp>
       <p:sp>
         <p:nvSpPr>
@@ -8305,13 +8274,6 @@
             <a:schemeClr val="dk1"/>
           </a:fontRef>
         </p:style>
-        <p:txBody>
-          <a:bodyPr/>
-          <a:lstStyle/>
-          <a:p>
-            <a:endParaRPr lang="cs-CZ"/>
-          </a:p>
-        </p:txBody>
       </p:sp>
       <p:sp>
         <p:nvSpPr>
@@ -8457,13 +8419,6 @@
             <a:prstDash val="solid"/>
           </a:ln>
         </p:spPr>
-        <p:txBody>
-          <a:bodyPr/>
-          <a:lstStyle/>
-          <a:p>
-            <a:endParaRPr lang="cs-CZ"/>
-          </a:p>
-        </p:txBody>
       </p:sp>
       <p:sp>
         <p:nvSpPr>
@@ -8583,13 +8538,6 @@
             <a:schemeClr val="dk1"/>
           </a:fontRef>
         </p:style>
-        <p:txBody>
-          <a:bodyPr/>
-          <a:lstStyle/>
-          <a:p>
-            <a:endParaRPr lang="cs-CZ"/>
-          </a:p>
-        </p:txBody>
       </p:sp>
       <p:sp>
         <p:nvSpPr>
@@ -9056,13 +9004,6 @@
             <a:prstDash val="solid"/>
           </a:ln>
         </p:spPr>
-        <p:txBody>
-          <a:bodyPr/>
-          <a:lstStyle/>
-          <a:p>
-            <a:endParaRPr lang="cs-CZ"/>
-          </a:p>
-        </p:txBody>
       </p:sp>
       <p:sp>
         <p:nvSpPr>
@@ -9174,13 +9115,6 @@
             <a:schemeClr val="dk1"/>
           </a:fontRef>
         </p:style>
-        <p:txBody>
-          <a:bodyPr/>
-          <a:lstStyle/>
-          <a:p>
-            <a:endParaRPr lang="cs-CZ"/>
-          </a:p>
-        </p:txBody>
       </p:sp>
       <p:sp>
         <p:nvSpPr>
@@ -9410,13 +9344,6 @@
             <a:schemeClr val="dk1"/>
           </a:fontRef>
         </p:style>
-        <p:txBody>
-          <a:bodyPr/>
-          <a:lstStyle/>
-          <a:p>
-            <a:endParaRPr lang="cs-CZ"/>
-          </a:p>
-        </p:txBody>
       </p:sp>
       <p:sp>
         <p:nvSpPr>
@@ -9518,13 +9445,6 @@
             <a:schemeClr val="dk1"/>
           </a:fontRef>
         </p:style>
-        <p:txBody>
-          <a:bodyPr/>
-          <a:lstStyle/>
-          <a:p>
-            <a:endParaRPr lang="cs-CZ"/>
-          </a:p>
-        </p:txBody>
       </p:sp>
       <p:sp>
         <p:nvSpPr>
@@ -9653,13 +9573,6 @@
             <a:prstDash val="solid"/>
           </a:ln>
         </p:spPr>
-        <p:txBody>
-          <a:bodyPr/>
-          <a:lstStyle/>
-          <a:p>
-            <a:endParaRPr lang="cs-CZ"/>
-          </a:p>
-        </p:txBody>
       </p:sp>
       <p:sp>
         <p:nvSpPr>
@@ -9787,13 +9700,6 @@
             <a:schemeClr val="dk1"/>
           </a:fontRef>
         </p:style>
-        <p:txBody>
-          <a:bodyPr/>
-          <a:lstStyle/>
-          <a:p>
-            <a:endParaRPr lang="cs-CZ"/>
-          </a:p>
-        </p:txBody>
       </p:sp>
       <p:sp>
         <p:nvSpPr>
@@ -9983,13 +9889,6 @@
             <a:schemeClr val="dk1"/>
           </a:fontRef>
         </p:style>
-        <p:txBody>
-          <a:bodyPr/>
-          <a:lstStyle/>
-          <a:p>
-            <a:endParaRPr lang="cs-CZ"/>
-          </a:p>
-        </p:txBody>
       </p:sp>
       <p:sp>
         <p:nvSpPr>
@@ -10221,13 +10120,6 @@
             <a:prstDash val="solid"/>
           </a:ln>
         </p:spPr>
-        <p:txBody>
-          <a:bodyPr/>
-          <a:lstStyle/>
-          <a:p>
-            <a:endParaRPr lang="cs-CZ"/>
-          </a:p>
-        </p:txBody>
       </p:sp>
       <p:sp>
         <p:nvSpPr>
@@ -10331,13 +10223,6 @@
             <a:schemeClr val="dk1"/>
           </a:fontRef>
         </p:style>
-        <p:txBody>
-          <a:bodyPr/>
-          <a:lstStyle/>
-          <a:p>
-            <a:endParaRPr lang="cs-CZ"/>
-          </a:p>
-        </p:txBody>
       </p:sp>
       <p:sp>
         <p:nvSpPr>
@@ -10758,13 +10643,6 @@
             <a:schemeClr val="dk1"/>
           </a:fontRef>
         </p:style>
-        <p:txBody>
-          <a:bodyPr/>
-          <a:lstStyle/>
-          <a:p>
-            <a:endParaRPr lang="cs-CZ"/>
-          </a:p>
-        </p:txBody>
       </p:sp>
       <p:sp>
         <p:nvSpPr>
@@ -10873,13 +10751,6 @@
             <a:schemeClr val="dk1"/>
           </a:fontRef>
         </p:style>
-        <p:txBody>
-          <a:bodyPr/>
-          <a:lstStyle/>
-          <a:p>
-            <a:endParaRPr lang="cs-CZ"/>
-          </a:p>
-        </p:txBody>
       </p:sp>
       <p:sp>
         <p:nvSpPr>
@@ -10988,13 +10859,6 @@
             <a:schemeClr val="dk1"/>
           </a:fontRef>
         </p:style>
-        <p:txBody>
-          <a:bodyPr/>
-          <a:lstStyle/>
-          <a:p>
-            <a:endParaRPr lang="cs-CZ"/>
-          </a:p>
-        </p:txBody>
       </p:sp>
       <p:sp>
         <p:nvSpPr>
@@ -11105,13 +10969,6 @@
             <a:schemeClr val="dk1"/>
           </a:fontRef>
         </p:style>
-        <p:txBody>
-          <a:bodyPr/>
-          <a:lstStyle/>
-          <a:p>
-            <a:endParaRPr lang="cs-CZ"/>
-          </a:p>
-        </p:txBody>
       </p:sp>
       <p:sp>
         <p:nvSpPr>
@@ -11289,13 +11146,6 @@
             <a:schemeClr val="dk1"/>
           </a:fontRef>
         </p:style>
-        <p:txBody>
-          <a:bodyPr/>
-          <a:lstStyle/>
-          <a:p>
-            <a:endParaRPr lang="cs-CZ"/>
-          </a:p>
-        </p:txBody>
       </p:sp>
       <p:sp>
         <p:nvSpPr>
@@ -11457,13 +11307,6 @@
             <a:schemeClr val="dk1"/>
           </a:fontRef>
         </p:style>
-        <p:txBody>
-          <a:bodyPr/>
-          <a:lstStyle/>
-          <a:p>
-            <a:endParaRPr lang="cs-CZ"/>
-          </a:p>
-        </p:txBody>
       </p:sp>
       <p:sp>
         <p:nvSpPr>
@@ -11730,7 +11573,7 @@
         </p:nvSpPr>
         <p:spPr>
           <a:xfrm>
-            <a:off x="457200" y="994012"/>
+            <a:off x="457200" y="916806"/>
             <a:ext cx="8229600" cy="365760"/>
           </a:xfrm>
           <a:prstGeom prst="rect">
@@ -11788,13 +11631,6 @@
             <a:schemeClr val="dk1"/>
           </a:fontRef>
         </p:style>
-        <p:txBody>
-          <a:bodyPr/>
-          <a:lstStyle/>
-          <a:p>
-            <a:endParaRPr lang="cs-CZ"/>
-          </a:p>
-        </p:txBody>
       </p:sp>
       <p:sp>
         <p:nvSpPr>
@@ -11893,13 +11729,6 @@
             <a:schemeClr val="dk1"/>
           </a:fontRef>
         </p:style>
-        <p:txBody>
-          <a:bodyPr/>
-          <a:lstStyle/>
-          <a:p>
-            <a:endParaRPr lang="cs-CZ"/>
-          </a:p>
-        </p:txBody>
       </p:sp>
       <p:sp>
         <p:nvSpPr>
@@ -12180,13 +12009,6 @@
             <a:prstDash val="solid"/>
           </a:ln>
         </p:spPr>
-        <p:txBody>
-          <a:bodyPr/>
-          <a:lstStyle/>
-          <a:p>
-            <a:endParaRPr lang="cs-CZ"/>
-          </a:p>
-        </p:txBody>
       </p:sp>
       <p:sp>
         <p:nvSpPr>
@@ -12290,13 +12112,6 @@
             <a:schemeClr val="dk1"/>
           </a:fontRef>
         </p:style>
-        <p:txBody>
-          <a:bodyPr/>
-          <a:lstStyle/>
-          <a:p>
-            <a:endParaRPr lang="cs-CZ"/>
-          </a:p>
-        </p:txBody>
       </p:sp>
       <p:sp>
         <p:nvSpPr>
@@ -12825,13 +12640,6 @@
             <a:prstDash val="solid"/>
           </a:ln>
         </p:spPr>
-        <p:txBody>
-          <a:bodyPr/>
-          <a:lstStyle/>
-          <a:p>
-            <a:endParaRPr lang="cs-CZ"/>
-          </a:p>
-        </p:txBody>
       </p:sp>
       <p:sp>
         <p:nvSpPr>
@@ -12935,13 +12743,6 @@
             <a:schemeClr val="dk1"/>
           </a:fontRef>
         </p:style>
-        <p:txBody>
-          <a:bodyPr/>
-          <a:lstStyle/>
-          <a:p>
-            <a:endParaRPr lang="cs-CZ"/>
-          </a:p>
-        </p:txBody>
       </p:sp>
       <p:sp>
         <p:nvSpPr>
@@ -13080,13 +12881,6 @@
             <a:schemeClr val="dk1"/>
           </a:fontRef>
         </p:style>
-        <p:txBody>
-          <a:bodyPr/>
-          <a:lstStyle/>
-          <a:p>
-            <a:endParaRPr lang="cs-CZ"/>
-          </a:p>
-        </p:txBody>
       </p:sp>
       <p:sp>
         <p:nvSpPr>
@@ -13289,13 +13083,6 @@
             <a:schemeClr val="dk1"/>
           </a:fontRef>
         </p:style>
-        <p:txBody>
-          <a:bodyPr/>
-          <a:lstStyle/>
-          <a:p>
-            <a:endParaRPr lang="cs-CZ"/>
-          </a:p>
-        </p:txBody>
       </p:sp>
       <p:sp>
         <p:nvSpPr>
@@ -13440,13 +13227,6 @@
             <a:prstDash val="solid"/>
           </a:ln>
         </p:spPr>
-        <p:txBody>
-          <a:bodyPr/>
-          <a:lstStyle/>
-          <a:p>
-            <a:endParaRPr lang="cs-CZ"/>
-          </a:p>
-        </p:txBody>
       </p:sp>
       <p:sp>
         <p:nvSpPr>
@@ -13598,13 +13378,6 @@
             <a:schemeClr val="dk1"/>
           </a:fontRef>
         </p:style>
-        <p:txBody>
-          <a:bodyPr/>
-          <a:lstStyle/>
-          <a:p>
-            <a:endParaRPr lang="cs-CZ"/>
-          </a:p>
-        </p:txBody>
       </p:sp>
       <p:sp>
         <p:nvSpPr>
@@ -14110,13 +13883,6 @@
             <a:prstDash val="solid"/>
           </a:ln>
         </p:spPr>
-        <p:txBody>
-          <a:bodyPr/>
-          <a:lstStyle/>
-          <a:p>
-            <a:endParaRPr lang="cs-CZ"/>
-          </a:p>
-        </p:txBody>
       </p:sp>
       <p:sp>
         <p:nvSpPr>
@@ -14220,13 +13986,6 @@
             <a:schemeClr val="dk1"/>
           </a:fontRef>
         </p:style>
-        <p:txBody>
-          <a:bodyPr/>
-          <a:lstStyle/>
-          <a:p>
-            <a:endParaRPr lang="cs-CZ"/>
-          </a:p>
-        </p:txBody>
       </p:sp>
       <p:sp>
         <p:nvSpPr>
@@ -14376,13 +14135,6 @@
             <a:prstDash val="solid"/>
           </a:ln>
         </p:spPr>
-        <p:txBody>
-          <a:bodyPr/>
-          <a:lstStyle/>
-          <a:p>
-            <a:endParaRPr lang="cs-CZ"/>
-          </a:p>
-        </p:txBody>
       </p:sp>
       <p:sp>
         <p:nvSpPr>
@@ -14747,13 +14499,6 @@
             <a:prstDash val="solid"/>
           </a:ln>
         </p:spPr>
-        <p:txBody>
-          <a:bodyPr/>
-          <a:lstStyle/>
-          <a:p>
-            <a:endParaRPr lang="cs-CZ"/>
-          </a:p>
-        </p:txBody>
       </p:sp>
       <p:sp>
         <p:nvSpPr>
@@ -14897,13 +14642,6 @@
             <a:schemeClr val="dk1"/>
           </a:fontRef>
         </p:style>
-        <p:txBody>
-          <a:bodyPr/>
-          <a:lstStyle/>
-          <a:p>
-            <a:endParaRPr lang="cs-CZ"/>
-          </a:p>
-        </p:txBody>
       </p:sp>
       <p:sp>
         <p:nvSpPr>
@@ -15093,13 +14831,6 @@
             <a:schemeClr val="dk1"/>
           </a:fontRef>
         </p:style>
-        <p:txBody>
-          <a:bodyPr/>
-          <a:lstStyle/>
-          <a:p>
-            <a:endParaRPr lang="cs-CZ"/>
-          </a:p>
-        </p:txBody>
       </p:sp>
       <p:sp>
         <p:nvSpPr>
@@ -15264,13 +14995,6 @@
             <a:schemeClr val="dk1"/>
           </a:fontRef>
         </p:style>
-        <p:txBody>
-          <a:bodyPr/>
-          <a:lstStyle/>
-          <a:p>
-            <a:endParaRPr lang="cs-CZ"/>
-          </a:p>
-        </p:txBody>
       </p:sp>
       <p:sp>
         <p:nvSpPr>
@@ -15406,13 +15130,6 @@
             <a:prstDash val="solid"/>
           </a:ln>
         </p:spPr>
-        <p:txBody>
-          <a:bodyPr/>
-          <a:lstStyle/>
-          <a:p>
-            <a:endParaRPr lang="cs-CZ"/>
-          </a:p>
-        </p:txBody>
       </p:sp>
       <p:sp>
         <p:nvSpPr>
@@ -15540,13 +15257,6 @@
             <a:schemeClr val="dk1"/>
           </a:fontRef>
         </p:style>
-        <p:txBody>
-          <a:bodyPr/>
-          <a:lstStyle/>
-          <a:p>
-            <a:endParaRPr lang="cs-CZ"/>
-          </a:p>
-        </p:txBody>
       </p:sp>
       <p:sp>
         <p:nvSpPr>
